--- a/reports and documentations/MalariaDx_Pitch.pptx
+++ b/reports and documentations/MalariaDx_Pitch.pptx
@@ -1302,15 +1302,24 @@
               <a:buNone/>
             </a:pPr>
             <a:r>
-              <a:rPr lang="en-US" sz="1000" b="1" kern="0" spc="400" dirty="0">
+              <a:rPr lang="en-US" sz="1200" b="1" kern="0" spc="400" dirty="0" smtClean="0">
                 <a:solidFill>
                   <a:srgbClr val="10B981"/>
                 </a:solidFill>
                 <a:latin typeface="Calibri" pitchFamily="34" charset="0"/>
-                <a:ea typeface="Calibri" pitchFamily="34" charset="-122"/>
-                <a:cs typeface="Calibri" pitchFamily="34" charset="-120"/>
-              </a:rPr>
-              <a:t>MALARIA INNOVATION HACKATHON</a:t>
+                <a:cs typeface="Calibri" pitchFamily="34" charset="-120"/>
+              </a:rPr>
+              <a:t>NACOSS TECHFEST HACKATHON</a:t>
+            </a:r>
+            <a:r>
+              <a:rPr lang="en-US" sz="1000" b="1" kern="0" spc="400" dirty="0" smtClean="0">
+                <a:solidFill>
+                  <a:srgbClr val="10B981"/>
+                </a:solidFill>
+                <a:latin typeface="Calibri" pitchFamily="34" charset="0"/>
+                <a:cs typeface="Calibri" pitchFamily="34" charset="-120"/>
+              </a:rPr>
+              <a:t> </a:t>
             </a:r>
             <a:endParaRPr lang="en-US" sz="1000" dirty="0"/>
           </a:p>
@@ -1341,7 +1350,7 @@
               <a:buNone/>
             </a:pPr>
             <a:r>
-              <a:rPr lang="en-US" sz="6200" b="1" dirty="0">
+              <a:rPr lang="en-US" sz="7200" b="1" dirty="0">
                 <a:solidFill>
                   <a:srgbClr val="FFFFFF"/>
                 </a:solidFill>
@@ -1351,7 +1360,7 @@
               </a:rPr>
               <a:t>MalariaDx</a:t>
             </a:r>
-            <a:endParaRPr lang="en-US" sz="6200" dirty="0"/>
+            <a:endParaRPr lang="en-US" sz="7200" dirty="0"/>
           </a:p>
         </p:txBody>
       </p:sp>
@@ -1380,7 +1389,7 @@
               <a:buNone/>
             </a:pPr>
             <a:r>
-              <a:rPr lang="en-US" sz="2200" dirty="0">
+              <a:rPr lang="en-US" sz="2800" dirty="0">
                 <a:solidFill>
                   <a:srgbClr val="6EE7B7"/>
                 </a:solidFill>
@@ -1390,14 +1399,14 @@
               </a:rPr>
               <a:t>AI-Powered Malaria Screening</a:t>
             </a:r>
-            <a:endParaRPr lang="en-US" sz="2200" dirty="0"/>
+            <a:endParaRPr lang="en-US" sz="2800" dirty="0"/>
           </a:p>
           <a:p>
             <a:pPr marL="0" indent="0" algn="l">
               <a:buNone/>
             </a:pPr>
             <a:r>
-              <a:rPr lang="en-US" sz="2200" dirty="0">
+              <a:rPr lang="en-US" sz="2800" dirty="0">
                 <a:solidFill>
                   <a:srgbClr val="6EE7B7"/>
                 </a:solidFill>
@@ -1407,7 +1416,7 @@
               </a:rPr>
               <a:t>&amp; Hospital Guidance System</a:t>
             </a:r>
-            <a:endParaRPr lang="en-US" sz="2200" dirty="0"/>
+            <a:endParaRPr lang="en-US" sz="2800" dirty="0"/>
           </a:p>
         </p:txBody>
       </p:sp>
@@ -1436,7 +1445,7 @@
               <a:buNone/>
             </a:pPr>
             <a:r>
-              <a:rPr lang="en-US" sz="1300" b="1" kern="0" spc="300" dirty="0">
+              <a:rPr lang="en-US" sz="1600" b="1" kern="0" spc="300" dirty="0">
                 <a:solidFill>
                   <a:srgbClr val="FFFFFF"/>
                 </a:solidFill>
@@ -1446,7 +1455,7 @@
               </a:rPr>
               <a:t>STAR TEAM</a:t>
             </a:r>
-            <a:endParaRPr lang="en-US" sz="1300" dirty="0"/>
+            <a:endParaRPr lang="en-US" sz="1600" dirty="0"/>
           </a:p>
         </p:txBody>
       </p:sp>
@@ -1500,7 +1509,7 @@
               <a:buNone/>
             </a:pPr>
             <a:r>
-              <a:rPr lang="en-US" sz="1100" i="1" dirty="0">
+              <a:rPr lang="en-US" sz="1400" i="1" dirty="0">
                 <a:solidFill>
                   <a:srgbClr val="6EE7B7"/>
                 </a:solidFill>
@@ -1510,7 +1519,7 @@
               </a:rPr>
               <a:t>Bridging AI and Healthcare Access in Africa</a:t>
             </a:r>
-            <a:endParaRPr lang="en-US" sz="1100" dirty="0"/>
+            <a:endParaRPr lang="en-US" sz="1400" dirty="0"/>
           </a:p>
         </p:txBody>
       </p:sp>
@@ -1519,13 +1528,13 @@
   <p:clrMapOvr>
     <a:masterClrMapping/>
   </p:clrMapOvr>
-  <mc:AlternateContent xmlns:mc="http://schemas.openxmlformats.org/markup-compatibility/2006">
-    <mc:Choice xmlns:p14="http://schemas.microsoft.com/office/powerpoint/2010/main" Requires="p14">
+  <mc:AlternateContent xmlns:mc="http://schemas.openxmlformats.org/markup-compatibility/2006" xmlns:p14="http://schemas.microsoft.com/office/powerpoint/2010/main">
+    <mc:Choice Requires="p14">
       <p:transition spd="med" p14:dur="700">
         <p:fade/>
       </p:transition>
     </mc:Choice>
-    <mc:Fallback>
+    <mc:Fallback xmlns="">
       <p:transition spd="med">
         <p:fade/>
       </p:transition>
@@ -1616,7 +1625,7 @@
               <a:buNone/>
             </a:pPr>
             <a:r>
-              <a:rPr lang="en-US" sz="2800" b="1" dirty="0">
+              <a:rPr lang="en-US" sz="4000" b="1" dirty="0">
                 <a:solidFill>
                   <a:srgbClr val="FFFFFF"/>
                 </a:solidFill>
@@ -1626,7 +1635,7 @@
               </a:rPr>
               <a:t>THE PROBLEM</a:t>
             </a:r>
-            <a:endParaRPr lang="en-US" sz="2800" dirty="0"/>
+            <a:endParaRPr lang="en-US" sz="4000" dirty="0"/>
           </a:p>
         </p:txBody>
       </p:sp>
@@ -1711,7 +1720,7 @@
               <a:buNone/>
             </a:pPr>
             <a:r>
-              <a:rPr lang="en-US" sz="3800" b="1" dirty="0">
+              <a:rPr lang="en-US" sz="4400" b="1" dirty="0">
                 <a:solidFill>
                   <a:srgbClr val="FFFFFF"/>
                 </a:solidFill>
@@ -1721,7 +1730,7 @@
               </a:rPr>
               <a:t>600K+</a:t>
             </a:r>
-            <a:endParaRPr lang="en-US" sz="3800" dirty="0"/>
+            <a:endParaRPr lang="en-US" sz="4400" dirty="0"/>
           </a:p>
         </p:txBody>
       </p:sp>
@@ -1750,7 +1759,7 @@
               <a:buNone/>
             </a:pPr>
             <a:r>
-              <a:rPr lang="en-US" sz="1100" dirty="0">
+              <a:rPr lang="en-US" dirty="0">
                 <a:solidFill>
                   <a:srgbClr val="FFFFFF"/>
                 </a:solidFill>
@@ -1760,14 +1769,14 @@
               </a:rPr>
               <a:t>Annual deaths</a:t>
             </a:r>
-            <a:endParaRPr lang="en-US" sz="1100" dirty="0"/>
+            <a:endParaRPr lang="en-US" dirty="0"/>
           </a:p>
           <a:p>
             <a:pPr marL="0" indent="0" algn="ctr">
               <a:buNone/>
             </a:pPr>
             <a:r>
-              <a:rPr lang="en-US" sz="1100" dirty="0">
+              <a:rPr lang="en-US" dirty="0">
                 <a:solidFill>
                   <a:srgbClr val="FFFFFF"/>
                 </a:solidFill>
@@ -1777,7 +1786,7 @@
               </a:rPr>
               <a:t>globally</a:t>
             </a:r>
-            <a:endParaRPr lang="en-US" sz="1100" dirty="0"/>
+            <a:endParaRPr lang="en-US" dirty="0"/>
           </a:p>
         </p:txBody>
       </p:sp>
@@ -1838,7 +1847,7 @@
               <a:buNone/>
             </a:pPr>
             <a:r>
-              <a:rPr lang="en-US" sz="3800" b="1" dirty="0">
+              <a:rPr lang="en-US" sz="4400" b="1" dirty="0">
                 <a:solidFill>
                   <a:srgbClr val="FFFFFF"/>
                 </a:solidFill>
@@ -1848,7 +1857,7 @@
               </a:rPr>
               <a:t>50%</a:t>
             </a:r>
-            <a:endParaRPr lang="en-US" sz="3800" dirty="0"/>
+            <a:endParaRPr lang="en-US" sz="4400" dirty="0"/>
           </a:p>
         </p:txBody>
       </p:sp>
@@ -1877,7 +1886,7 @@
               <a:buNone/>
             </a:pPr>
             <a:r>
-              <a:rPr lang="en-US" sz="1100" dirty="0">
+              <a:rPr lang="en-US" sz="1600" dirty="0">
                 <a:solidFill>
                   <a:srgbClr val="FFFFFF"/>
                 </a:solidFill>
@@ -1887,14 +1896,14 @@
               </a:rPr>
               <a:t>Cases delayed or</a:t>
             </a:r>
-            <a:endParaRPr lang="en-US" sz="1100" dirty="0"/>
+            <a:endParaRPr lang="en-US" sz="1600" dirty="0"/>
           </a:p>
           <a:p>
             <a:pPr marL="0" indent="0" algn="ctr">
               <a:buNone/>
             </a:pPr>
             <a:r>
-              <a:rPr lang="en-US" sz="1100" dirty="0">
+              <a:rPr lang="en-US" sz="1600" dirty="0">
                 <a:solidFill>
                   <a:srgbClr val="FFFFFF"/>
                 </a:solidFill>
@@ -1904,7 +1913,7 @@
               </a:rPr>
               <a:t>misdiagnosed</a:t>
             </a:r>
-            <a:endParaRPr lang="en-US" sz="1100" dirty="0"/>
+            <a:endParaRPr lang="en-US" sz="1600" dirty="0"/>
           </a:p>
         </p:txBody>
       </p:sp>
@@ -1965,7 +1974,7 @@
               <a:buNone/>
             </a:pPr>
             <a:r>
-              <a:rPr lang="en-US" sz="3800" b="1" dirty="0">
+              <a:rPr lang="en-US" sz="4400" b="1" dirty="0">
                 <a:solidFill>
                   <a:srgbClr val="FFFFFF"/>
                 </a:solidFill>
@@ -1975,7 +1984,7 @@
               </a:rPr>
               <a:t>80%</a:t>
             </a:r>
-            <a:endParaRPr lang="en-US" sz="3800" dirty="0"/>
+            <a:endParaRPr lang="en-US" sz="4400" dirty="0"/>
           </a:p>
         </p:txBody>
       </p:sp>
@@ -2004,7 +2013,7 @@
               <a:buNone/>
             </a:pPr>
             <a:r>
-              <a:rPr lang="en-US" sz="1100" dirty="0">
+              <a:rPr lang="en-US" sz="1600" dirty="0">
                 <a:solidFill>
                   <a:srgbClr val="FFFFFF"/>
                 </a:solidFill>
@@ -2014,14 +2023,14 @@
               </a:rPr>
               <a:t>Occur in</a:t>
             </a:r>
-            <a:endParaRPr lang="en-US" sz="1100" dirty="0"/>
+            <a:endParaRPr lang="en-US" sz="1600" dirty="0"/>
           </a:p>
           <a:p>
             <a:pPr marL="0" indent="0" algn="ctr">
               <a:buNone/>
             </a:pPr>
             <a:r>
-              <a:rPr lang="en-US" sz="1100" dirty="0">
+              <a:rPr lang="en-US" sz="1600" dirty="0">
                 <a:solidFill>
                   <a:srgbClr val="FFFFFF"/>
                 </a:solidFill>
@@ -2031,7 +2040,7 @@
               </a:rPr>
               <a:t>sub-Saharan Africa</a:t>
             </a:r>
-            <a:endParaRPr lang="en-US" sz="1100" dirty="0"/>
+            <a:endParaRPr lang="en-US" sz="1600" dirty="0"/>
           </a:p>
         </p:txBody>
       </p:sp>
@@ -2166,7 +2175,7 @@
               <a:buNone/>
             </a:pPr>
             <a:r>
-              <a:rPr lang="en-US" sz="1300" b="1" dirty="0">
+              <a:rPr lang="en-US" sz="2000" b="1" dirty="0">
                 <a:solidFill>
                   <a:srgbClr val="0A3D2E"/>
                 </a:solidFill>
@@ -2176,7 +2185,7 @@
               </a:rPr>
               <a:t>Symptoms Are Ambiguous</a:t>
             </a:r>
-            <a:endParaRPr lang="en-US" sz="1300" dirty="0"/>
+            <a:endParaRPr lang="en-US" sz="2000" dirty="0"/>
           </a:p>
         </p:txBody>
       </p:sp>
@@ -2205,7 +2214,7 @@
               <a:buNone/>
             </a:pPr>
             <a:r>
-              <a:rPr lang="en-US" sz="1150" dirty="0">
+              <a:rPr lang="en-US" dirty="0">
                 <a:solidFill>
                   <a:srgbClr val="64748B"/>
                 </a:solidFill>
@@ -2215,7 +2224,7 @@
               </a:rPr>
               <a:t>Fever, dizziness, and vomiting overlap with many diseases. Patients cannot self-diagnose reliably, leading to dangerous delays in seeking malaria-specific care.</a:t>
             </a:r>
-            <a:endParaRPr lang="en-US" sz="1150" dirty="0"/>
+            <a:endParaRPr lang="en-US" dirty="0"/>
           </a:p>
         </p:txBody>
       </p:sp>
@@ -2333,8 +2342,8 @@
         </p:nvSpPr>
         <p:spPr>
           <a:xfrm>
-            <a:off x="5742432" y="2761488"/>
-            <a:ext cx="3154680" cy="411480"/>
+            <a:off x="5609083" y="2761487"/>
+            <a:ext cx="3288029" cy="689101"/>
           </a:xfrm>
           <a:prstGeom prst="rect">
             <a:avLst/>
@@ -2350,7 +2359,7 @@
               <a:buNone/>
             </a:pPr>
             <a:r>
-              <a:rPr lang="en-US" sz="1300" b="1" dirty="0">
+              <a:rPr lang="en-US" sz="2000" b="1" dirty="0">
                 <a:solidFill>
                   <a:srgbClr val="0A3D2E"/>
                 </a:solidFill>
@@ -2360,7 +2369,7 @@
               </a:rPr>
               <a:t>Treatment Centers Are Hard to Find</a:t>
             </a:r>
-            <a:endParaRPr lang="en-US" sz="1300" dirty="0"/>
+            <a:endParaRPr lang="en-US" sz="2000" dirty="0"/>
           </a:p>
         </p:txBody>
       </p:sp>
@@ -2372,7 +2381,7 @@
         </p:nvSpPr>
         <p:spPr>
           <a:xfrm>
-            <a:off x="5029200" y="3273552"/>
+            <a:off x="5056632" y="3587749"/>
             <a:ext cx="3840480" cy="1417320"/>
           </a:xfrm>
           <a:prstGeom prst="rect">
@@ -2389,7 +2398,7 @@
               <a:buNone/>
             </a:pPr>
             <a:r>
-              <a:rPr lang="en-US" sz="1150" dirty="0">
+              <a:rPr lang="en-US" dirty="0">
                 <a:solidFill>
                   <a:srgbClr val="64748B"/>
                 </a:solidFill>
@@ -2399,7 +2408,7 @@
               </a:rPr>
               <a:t>Patients in rural and peri-urban areas are often unaware of nearby clinics. Without guidance, high-risk individuals never reach appropriate treatment.</a:t>
             </a:r>
-            <a:endParaRPr lang="en-US" sz="1150" dirty="0"/>
+            <a:endParaRPr lang="en-US" dirty="0"/>
           </a:p>
         </p:txBody>
       </p:sp>
@@ -2408,13 +2417,13 @@
   <p:clrMapOvr>
     <a:masterClrMapping/>
   </p:clrMapOvr>
-  <mc:AlternateContent xmlns:mc="http://schemas.openxmlformats.org/markup-compatibility/2006">
-    <mc:Choice xmlns:p14="http://schemas.microsoft.com/office/powerpoint/2010/main" Requires="p14">
+  <mc:AlternateContent xmlns:mc="http://schemas.openxmlformats.org/markup-compatibility/2006" xmlns:p14="http://schemas.microsoft.com/office/powerpoint/2010/main">
+    <mc:Choice Requires="p14">
       <p:transition spd="med" p14:dur="700">
         <p:fade/>
       </p:transition>
     </mc:Choice>
-    <mc:Fallback>
+    <mc:Fallback xmlns="">
       <p:transition spd="med">
         <p:fade/>
       </p:transition>
@@ -2509,7 +2518,7 @@
               <a:buNone/>
             </a:pPr>
             <a:r>
-              <a:rPr lang="en-US" sz="1200" b="1" kern="0" spc="400" dirty="0">
+              <a:rPr lang="en-US" b="1" kern="0" spc="400" dirty="0">
                 <a:solidFill>
                   <a:srgbClr val="10B981"/>
                 </a:solidFill>
@@ -2519,7 +2528,7 @@
               </a:rPr>
               <a:t>OUR SOLUTION</a:t>
             </a:r>
-            <a:endParaRPr lang="en-US" sz="1200" dirty="0"/>
+            <a:endParaRPr lang="en-US" dirty="0"/>
           </a:p>
         </p:txBody>
       </p:sp>
@@ -2548,7 +2557,7 @@
               <a:buNone/>
             </a:pPr>
             <a:r>
-              <a:rPr lang="en-US" sz="5200" b="1" dirty="0">
+              <a:rPr lang="en-US" sz="6000" b="1" dirty="0">
                 <a:solidFill>
                   <a:srgbClr val="FFFFFF"/>
                 </a:solidFill>
@@ -2558,7 +2567,7 @@
               </a:rPr>
               <a:t>MalariaDx</a:t>
             </a:r>
-            <a:endParaRPr lang="en-US" sz="5200" dirty="0"/>
+            <a:endParaRPr lang="en-US" sz="6000" dirty="0"/>
           </a:p>
         </p:txBody>
       </p:sp>
@@ -2587,7 +2596,7 @@
               <a:buNone/>
             </a:pPr>
             <a:r>
-              <a:rPr lang="en-US" sz="1350" dirty="0">
+              <a:rPr lang="en-US" dirty="0">
                 <a:solidFill>
                   <a:srgbClr val="6EE7B7"/>
                 </a:solidFill>
@@ -2597,14 +2606,14 @@
               </a:rPr>
               <a:t>An intelligent, lightweight web platform that empowers</a:t>
             </a:r>
-            <a:endParaRPr lang="en-US" sz="1350" dirty="0"/>
+            <a:endParaRPr lang="en-US" dirty="0"/>
           </a:p>
           <a:p>
             <a:pPr marL="0" indent="0" algn="l">
               <a:buNone/>
             </a:pPr>
             <a:r>
-              <a:rPr lang="en-US" sz="1350" dirty="0">
+              <a:rPr lang="en-US" dirty="0">
                 <a:solidFill>
                   <a:srgbClr val="6EE7B7"/>
                 </a:solidFill>
@@ -2614,14 +2623,14 @@
               </a:rPr>
               <a:t>patients to screen for malaria instantly and find</a:t>
             </a:r>
-            <a:endParaRPr lang="en-US" sz="1350" dirty="0"/>
+            <a:endParaRPr lang="en-US" dirty="0"/>
           </a:p>
           <a:p>
             <a:pPr marL="0" indent="0" algn="l">
               <a:buNone/>
             </a:pPr>
             <a:r>
-              <a:rPr lang="en-US" sz="1350" dirty="0">
+              <a:rPr lang="en-US" dirty="0">
                 <a:solidFill>
                   <a:srgbClr val="6EE7B7"/>
                 </a:solidFill>
@@ -2631,7 +2640,7 @@
               </a:rPr>
               <a:t>nearby treatment — no lab visit required.</a:t>
             </a:r>
-            <a:endParaRPr lang="en-US" sz="1350" dirty="0"/>
+            <a:endParaRPr lang="en-US" dirty="0"/>
           </a:p>
         </p:txBody>
       </p:sp>
@@ -2709,7 +2718,7 @@
               <a:buNone/>
             </a:pPr>
             <a:r>
-              <a:rPr lang="en-US" sz="1350" b="1" dirty="0">
+              <a:rPr lang="en-US" sz="1600" b="1" dirty="0">
                 <a:solidFill>
                   <a:srgbClr val="FFFFFF"/>
                 </a:solidFill>
@@ -2719,7 +2728,7 @@
               </a:rPr>
               <a:t>AI Symptom Screening</a:t>
             </a:r>
-            <a:endParaRPr lang="en-US" sz="1350" dirty="0"/>
+            <a:endParaRPr lang="en-US" sz="1600" dirty="0"/>
           </a:p>
         </p:txBody>
       </p:sp>
@@ -2748,7 +2757,7 @@
               <a:buNone/>
             </a:pPr>
             <a:r>
-              <a:rPr lang="en-US" sz="1100" dirty="0">
+              <a:rPr lang="en-US" sz="1400" dirty="0">
                 <a:solidFill>
                   <a:srgbClr val="6EE7B7"/>
                 </a:solidFill>
@@ -2758,7 +2767,7 @@
               </a:rPr>
               <a:t>Enter symptoms like fever, chills, vomiting. Get instant malaria risk: Low, Medium, or High.</a:t>
             </a:r>
-            <a:endParaRPr lang="en-US" sz="1100" dirty="0"/>
+            <a:endParaRPr lang="en-US" sz="1400" dirty="0"/>
           </a:p>
         </p:txBody>
       </p:sp>
@@ -2836,7 +2845,7 @@
               <a:buNone/>
             </a:pPr>
             <a:r>
-              <a:rPr lang="en-US" sz="1350" b="1" dirty="0">
+              <a:rPr lang="en-US" sz="1600" b="1" dirty="0">
                 <a:solidFill>
                   <a:srgbClr val="FFFFFF"/>
                 </a:solidFill>
@@ -2846,7 +2855,7 @@
               </a:rPr>
               <a:t>Hospital Locator</a:t>
             </a:r>
-            <a:endParaRPr lang="en-US" sz="1350" dirty="0"/>
+            <a:endParaRPr lang="en-US" sz="1600" dirty="0"/>
           </a:p>
         </p:txBody>
       </p:sp>
@@ -2875,6 +2884,17 @@
               <a:buNone/>
             </a:pPr>
             <a:r>
+              <a:rPr lang="en-US" sz="1400" dirty="0">
+                <a:solidFill>
+                  <a:srgbClr val="6EE7B7"/>
+                </a:solidFill>
+                <a:latin typeface="Calibri" pitchFamily="34" charset="0"/>
+                <a:ea typeface="Calibri" pitchFamily="34" charset="-122"/>
+                <a:cs typeface="Calibri" pitchFamily="34" charset="-120"/>
+              </a:rPr>
+              <a:t>Integrated location services direct high-risk patients to the nearest treatment center</a:t>
+            </a:r>
+            <a:r>
               <a:rPr lang="en-US" sz="1100" dirty="0">
                 <a:solidFill>
                   <a:srgbClr val="6EE7B7"/>
@@ -2883,7 +2903,7 @@
                 <a:ea typeface="Calibri" pitchFamily="34" charset="-122"/>
                 <a:cs typeface="Calibri" pitchFamily="34" charset="-120"/>
               </a:rPr>
-              <a:t>Integrated location services direct high-risk patients to the nearest treatment center.</a:t>
+              <a:t>.</a:t>
             </a:r>
             <a:endParaRPr lang="en-US" sz="1100" dirty="0"/>
           </a:p>
@@ -3002,7 +3022,7 @@
               <a:buNone/>
             </a:pPr>
             <a:r>
-              <a:rPr lang="en-US" sz="1100" dirty="0">
+              <a:rPr lang="en-US" sz="1400" dirty="0">
                 <a:solidFill>
                   <a:srgbClr val="6EE7B7"/>
                 </a:solidFill>
@@ -3012,7 +3032,7 @@
               </a:rPr>
               <a:t>Lightweight web app works on smartphones and low-cost devices — no special hardware needed.</a:t>
             </a:r>
-            <a:endParaRPr lang="en-US" sz="1100" dirty="0"/>
+            <a:endParaRPr lang="en-US" sz="1400" dirty="0"/>
           </a:p>
         </p:txBody>
       </p:sp>
@@ -3021,13 +3041,13 @@
   <p:clrMapOvr>
     <a:masterClrMapping/>
   </p:clrMapOvr>
-  <mc:AlternateContent xmlns:mc="http://schemas.openxmlformats.org/markup-compatibility/2006">
-    <mc:Choice xmlns:p14="http://schemas.microsoft.com/office/powerpoint/2010/main" Requires="p14">
+  <mc:AlternateContent xmlns:mc="http://schemas.openxmlformats.org/markup-compatibility/2006" xmlns:p14="http://schemas.microsoft.com/office/powerpoint/2010/main">
+    <mc:Choice Requires="p14">
       <p:transition spd="med" p14:dur="700">
         <p:fade/>
       </p:transition>
     </mc:Choice>
-    <mc:Fallback>
+    <mc:Fallback xmlns="">
       <p:transition spd="med">
         <p:fade/>
       </p:transition>
@@ -3118,7 +3138,7 @@
               <a:buNone/>
             </a:pPr>
             <a:r>
-              <a:rPr lang="en-US" sz="2800" b="1" dirty="0">
+              <a:rPr lang="en-US" sz="3200" b="1" dirty="0">
                 <a:solidFill>
                   <a:srgbClr val="FFFFFF"/>
                 </a:solidFill>
@@ -3128,7 +3148,7 @@
               </a:rPr>
               <a:t>HOW IT WORKS</a:t>
             </a:r>
-            <a:endParaRPr lang="en-US" sz="2800" dirty="0"/>
+            <a:endParaRPr lang="en-US" sz="3200" dirty="0"/>
           </a:p>
         </p:txBody>
       </p:sp>
@@ -3140,14 +3160,14 @@
         </p:nvSpPr>
         <p:spPr>
           <a:xfrm>
-            <a:off x="228600" y="1188720"/>
+            <a:off x="348668" y="1188720"/>
             <a:ext cx="1554480" cy="2606040"/>
           </a:xfrm>
           <a:prstGeom prst="rect">
             <a:avLst/>
           </a:prstGeom>
           <a:solidFill>
-            <a:srgbClr val="0D7A5F"/>
+            <a:srgbClr val="157A4A"/>
           </a:solidFill>
           <a:ln w="12700">
             <a:solidFill>
@@ -3172,7 +3192,7 @@
         </p:nvSpPr>
         <p:spPr>
           <a:xfrm>
-            <a:off x="228600" y="1234440"/>
+            <a:off x="348668" y="1234440"/>
             <a:ext cx="1554480" cy="640080"/>
           </a:xfrm>
           <a:prstGeom prst="rect">
@@ -3189,7 +3209,7 @@
               <a:buNone/>
             </a:pPr>
             <a:r>
-              <a:rPr lang="en-US" sz="2800" b="1" dirty="0">
+              <a:rPr lang="en-US" sz="3600" b="1" dirty="0">
                 <a:solidFill>
                   <a:srgbClr val="FFFFFF"/>
                 </a:solidFill>
@@ -3199,7 +3219,7 @@
               </a:rPr>
               <a:t>01</a:t>
             </a:r>
-            <a:endParaRPr lang="en-US" sz="2800" dirty="0"/>
+            <a:endParaRPr lang="en-US" sz="3600" dirty="0"/>
           </a:p>
         </p:txBody>
       </p:sp>
@@ -3211,7 +3231,7 @@
         </p:nvSpPr>
         <p:spPr>
           <a:xfrm>
-            <a:off x="228600" y="1920240"/>
+            <a:off x="348668" y="1920240"/>
             <a:ext cx="1554480" cy="548640"/>
           </a:xfrm>
           <a:prstGeom prst="rect">
@@ -3228,7 +3248,7 @@
               <a:buNone/>
             </a:pPr>
             <a:r>
-              <a:rPr lang="en-US" sz="1200" b="1" dirty="0">
+              <a:rPr lang="en-US" sz="1600" b="1" dirty="0">
                 <a:solidFill>
                   <a:srgbClr val="FFFFFF"/>
                 </a:solidFill>
@@ -3238,7 +3258,7 @@
               </a:rPr>
               <a:t>Patient</a:t>
             </a:r>
-            <a:endParaRPr lang="en-US" sz="1200" dirty="0"/>
+            <a:endParaRPr lang="en-US" sz="1600" dirty="0"/>
           </a:p>
         </p:txBody>
       </p:sp>
@@ -3250,7 +3270,7 @@
         </p:nvSpPr>
         <p:spPr>
           <a:xfrm>
-            <a:off x="228600" y="2514600"/>
+            <a:off x="348668" y="2514600"/>
             <a:ext cx="1554480" cy="1143000"/>
           </a:xfrm>
           <a:prstGeom prst="rect">
@@ -3267,7 +3287,7 @@
               <a:buNone/>
             </a:pPr>
             <a:r>
-              <a:rPr lang="en-US" sz="1000" dirty="0">
+              <a:rPr lang="en-US" sz="1100" dirty="0">
                 <a:solidFill>
                   <a:srgbClr val="FFFFFF"/>
                 </a:solidFill>
@@ -3277,7 +3297,7 @@
               </a:rPr>
               <a:t>Opens MalariaDx on any smartphone or browser</a:t>
             </a:r>
-            <a:endParaRPr lang="en-US" sz="1000" dirty="0"/>
+            <a:endParaRPr lang="en-US" sz="1100" dirty="0"/>
           </a:p>
         </p:txBody>
       </p:sp>
@@ -3289,7 +3309,7 @@
         </p:nvSpPr>
         <p:spPr>
           <a:xfrm>
-            <a:off x="1810512" y="2423160"/>
+            <a:off x="1930580" y="2423160"/>
             <a:ext cx="109728" cy="109728"/>
           </a:xfrm>
           <a:prstGeom prst="rect">
@@ -3314,7 +3334,7 @@
         </p:nvSpPr>
         <p:spPr>
           <a:xfrm>
-            <a:off x="1764792" y="2304288"/>
+            <a:off x="1884860" y="2304288"/>
             <a:ext cx="201168" cy="320040"/>
           </a:xfrm>
           <a:prstGeom prst="rect">
@@ -3333,7 +3353,10 @@
             <a:r>
               <a:rPr lang="en-US" sz="2000" b="1" dirty="0">
                 <a:solidFill>
-                  <a:srgbClr val="0D7A5F"/>
+                  <a:schemeClr val="accent6">
+                    <a:lumMod val="40000"/>
+                    <a:lumOff val="60000"/>
+                  </a:schemeClr>
                 </a:solidFill>
                 <a:latin typeface="Calibri" pitchFamily="34" charset="0"/>
                 <a:ea typeface="Calibri" pitchFamily="34" charset="-122"/>
@@ -3341,7 +3364,14 @@
               </a:rPr>
               <a:t>›</a:t>
             </a:r>
-            <a:endParaRPr lang="en-US" sz="2000" dirty="0"/>
+            <a:endParaRPr lang="en-US" sz="2000" dirty="0">
+              <a:solidFill>
+                <a:schemeClr val="accent6">
+                  <a:lumMod val="40000"/>
+                  <a:lumOff val="60000"/>
+                </a:schemeClr>
+              </a:solidFill>
+            </a:endParaRPr>
           </a:p>
         </p:txBody>
       </p:sp>
@@ -3353,14 +3383,14 @@
         </p:nvSpPr>
         <p:spPr>
           <a:xfrm>
-            <a:off x="1947672" y="1188720"/>
+            <a:off x="2067740" y="1188720"/>
             <a:ext cx="1554480" cy="2606040"/>
           </a:xfrm>
           <a:prstGeom prst="rect">
             <a:avLst/>
           </a:prstGeom>
           <a:solidFill>
-            <a:srgbClr val="0D7A5F"/>
+            <a:srgbClr val="10B981"/>
           </a:solidFill>
           <a:ln w="12700">
             <a:solidFill>
@@ -3385,7 +3415,7 @@
         </p:nvSpPr>
         <p:spPr>
           <a:xfrm>
-            <a:off x="1947672" y="1234440"/>
+            <a:off x="2067740" y="1234440"/>
             <a:ext cx="1554480" cy="640080"/>
           </a:xfrm>
           <a:prstGeom prst="rect">
@@ -3402,7 +3432,7 @@
               <a:buNone/>
             </a:pPr>
             <a:r>
-              <a:rPr lang="en-US" sz="2800" b="1" dirty="0">
+              <a:rPr lang="en-US" sz="3600" b="1" dirty="0">
                 <a:solidFill>
                   <a:srgbClr val="FFFFFF"/>
                 </a:solidFill>
@@ -3424,7 +3454,7 @@
         </p:nvSpPr>
         <p:spPr>
           <a:xfrm>
-            <a:off x="1947672" y="1920240"/>
+            <a:off x="2067740" y="1920240"/>
             <a:ext cx="1554480" cy="548640"/>
           </a:xfrm>
           <a:prstGeom prst="rect">
@@ -3441,7 +3471,7 @@
               <a:buNone/>
             </a:pPr>
             <a:r>
-              <a:rPr lang="en-US" sz="1200" b="1" dirty="0">
+              <a:rPr lang="en-US" sz="1600" b="1" dirty="0">
                 <a:solidFill>
                   <a:srgbClr val="FFFFFF"/>
                 </a:solidFill>
@@ -3451,7 +3481,7 @@
               </a:rPr>
               <a:t>Enter Symptoms</a:t>
             </a:r>
-            <a:endParaRPr lang="en-US" sz="1200" dirty="0"/>
+            <a:endParaRPr lang="en-US" sz="1600" dirty="0"/>
           </a:p>
         </p:txBody>
       </p:sp>
@@ -3463,7 +3493,7 @@
         </p:nvSpPr>
         <p:spPr>
           <a:xfrm>
-            <a:off x="1947672" y="2514600"/>
+            <a:off x="2067740" y="2514600"/>
             <a:ext cx="1554480" cy="1143000"/>
           </a:xfrm>
           <a:prstGeom prst="rect">
@@ -3480,7 +3510,7 @@
               <a:buNone/>
             </a:pPr>
             <a:r>
-              <a:rPr lang="en-US" sz="1000" dirty="0">
+              <a:rPr lang="en-US" sz="1100" dirty="0">
                 <a:solidFill>
                   <a:srgbClr val="FFFFFF"/>
                 </a:solidFill>
@@ -3490,7 +3520,7 @@
               </a:rPr>
               <a:t>Inputs fever, chills, vomiting &amp; demographic info</a:t>
             </a:r>
-            <a:endParaRPr lang="en-US" sz="1000" dirty="0"/>
+            <a:endParaRPr lang="en-US" sz="1100" dirty="0"/>
           </a:p>
         </p:txBody>
       </p:sp>
@@ -3502,7 +3532,7 @@
         </p:nvSpPr>
         <p:spPr>
           <a:xfrm>
-            <a:off x="3529584" y="2423160"/>
+            <a:off x="3649652" y="2423160"/>
             <a:ext cx="109728" cy="109728"/>
           </a:xfrm>
           <a:prstGeom prst="rect">
@@ -3527,7 +3557,7 @@
         </p:nvSpPr>
         <p:spPr>
           <a:xfrm>
-            <a:off x="3483864" y="2304288"/>
+            <a:off x="3603932" y="2304288"/>
             <a:ext cx="201168" cy="320040"/>
           </a:xfrm>
           <a:prstGeom prst="rect">
@@ -3546,7 +3576,10 @@
             <a:r>
               <a:rPr lang="en-US" sz="2000" b="1" dirty="0">
                 <a:solidFill>
-                  <a:srgbClr val="0D7A5F"/>
+                  <a:schemeClr val="accent6">
+                    <a:lumMod val="40000"/>
+                    <a:lumOff val="60000"/>
+                  </a:schemeClr>
                 </a:solidFill>
                 <a:latin typeface="Calibri" pitchFamily="34" charset="0"/>
                 <a:ea typeface="Calibri" pitchFamily="34" charset="-122"/>
@@ -3554,7 +3587,14 @@
               </a:rPr>
               <a:t>›</a:t>
             </a:r>
-            <a:endParaRPr lang="en-US" sz="2000" dirty="0"/>
+            <a:endParaRPr lang="en-US" sz="2000" dirty="0">
+              <a:solidFill>
+                <a:schemeClr val="accent6">
+                  <a:lumMod val="40000"/>
+                  <a:lumOff val="60000"/>
+                </a:schemeClr>
+              </a:solidFill>
+            </a:endParaRPr>
           </a:p>
         </p:txBody>
       </p:sp>
@@ -3566,7 +3606,7 @@
         </p:nvSpPr>
         <p:spPr>
           <a:xfrm>
-            <a:off x="3666744" y="1188720"/>
+            <a:off x="3786812" y="1188720"/>
             <a:ext cx="1554480" cy="2606040"/>
           </a:xfrm>
           <a:prstGeom prst="rect">
@@ -3598,7 +3638,7 @@
         </p:nvSpPr>
         <p:spPr>
           <a:xfrm>
-            <a:off x="3666744" y="1234440"/>
+            <a:off x="3786812" y="1234440"/>
             <a:ext cx="1554480" cy="640080"/>
           </a:xfrm>
           <a:prstGeom prst="rect">
@@ -3615,7 +3655,7 @@
               <a:buNone/>
             </a:pPr>
             <a:r>
-              <a:rPr lang="en-US" sz="2800" b="1" dirty="0">
+              <a:rPr lang="en-US" sz="3600" b="1" dirty="0">
                 <a:solidFill>
                   <a:srgbClr val="10B981"/>
                 </a:solidFill>
@@ -3637,7 +3677,7 @@
         </p:nvSpPr>
         <p:spPr>
           <a:xfrm>
-            <a:off x="3666744" y="1920240"/>
+            <a:off x="3786812" y="1920240"/>
             <a:ext cx="1554480" cy="548640"/>
           </a:xfrm>
           <a:prstGeom prst="rect">
@@ -3654,7 +3694,7 @@
               <a:buNone/>
             </a:pPr>
             <a:r>
-              <a:rPr lang="en-US" sz="1200" b="1" dirty="0">
+              <a:rPr lang="en-US" sz="1600" b="1" dirty="0">
                 <a:solidFill>
                   <a:srgbClr val="FFFFFF"/>
                 </a:solidFill>
@@ -3664,58 +3704,58 @@
               </a:rPr>
               <a:t>AI Analysis</a:t>
             </a:r>
+            <a:endParaRPr lang="en-US" sz="1600" dirty="0"/>
+          </a:p>
+        </p:txBody>
+      </p:sp>
+      <p:sp>
+        <p:nvSpPr>
+          <p:cNvPr id="19" name="Text 17"/>
+          <p:cNvSpPr/>
+          <p:nvPr/>
+        </p:nvSpPr>
+        <p:spPr>
+          <a:xfrm>
+            <a:off x="3786812" y="2514600"/>
+            <a:ext cx="1554480" cy="1143000"/>
+          </a:xfrm>
+          <a:prstGeom prst="rect">
+            <a:avLst/>
+          </a:prstGeom>
+          <a:noFill/>
+          <a:ln/>
+        </p:spPr>
+        <p:txBody>
+          <a:bodyPr wrap="square" rtlCol="0" anchor="t"/>
+          <a:lstStyle/>
+          <a:p>
+            <a:pPr marL="0" indent="0" algn="ctr">
+              <a:buNone/>
+            </a:pPr>
+            <a:r>
+              <a:rPr lang="en-US" sz="1200" dirty="0">
+                <a:solidFill>
+                  <a:srgbClr val="6EE7B7"/>
+                </a:solidFill>
+                <a:latin typeface="Calibri" pitchFamily="34" charset="0"/>
+                <a:ea typeface="Calibri" pitchFamily="34" charset="-122"/>
+                <a:cs typeface="Calibri" pitchFamily="34" charset="-120"/>
+              </a:rPr>
+              <a:t>XGBoost model processes symptom pattern in real-time</a:t>
+            </a:r>
             <a:endParaRPr lang="en-US" sz="1200" dirty="0"/>
           </a:p>
         </p:txBody>
       </p:sp>
       <p:sp>
         <p:nvSpPr>
-          <p:cNvPr id="19" name="Text 17"/>
-          <p:cNvSpPr/>
-          <p:nvPr/>
-        </p:nvSpPr>
-        <p:spPr>
-          <a:xfrm>
-            <a:off x="3666744" y="2514600"/>
-            <a:ext cx="1554480" cy="1143000"/>
-          </a:xfrm>
-          <a:prstGeom prst="rect">
-            <a:avLst/>
-          </a:prstGeom>
-          <a:noFill/>
-          <a:ln/>
-        </p:spPr>
-        <p:txBody>
-          <a:bodyPr wrap="square" rtlCol="0" anchor="t"/>
-          <a:lstStyle/>
-          <a:p>
-            <a:pPr marL="0" indent="0" algn="ctr">
-              <a:buNone/>
-            </a:pPr>
-            <a:r>
-              <a:rPr lang="en-US" sz="1000" dirty="0">
-                <a:solidFill>
-                  <a:srgbClr val="6EE7B7"/>
-                </a:solidFill>
-                <a:latin typeface="Calibri" pitchFamily="34" charset="0"/>
-                <a:ea typeface="Calibri" pitchFamily="34" charset="-122"/>
-                <a:cs typeface="Calibri" pitchFamily="34" charset="-120"/>
-              </a:rPr>
-              <a:t>XGBoost model processes symptom pattern in real-time</a:t>
-            </a:r>
-            <a:endParaRPr lang="en-US" sz="1000" dirty="0"/>
-          </a:p>
-        </p:txBody>
-      </p:sp>
-      <p:sp>
-        <p:nvSpPr>
           <p:cNvPr id="20" name="Shape 18"/>
           <p:cNvSpPr/>
           <p:nvPr/>
         </p:nvSpPr>
         <p:spPr>
           <a:xfrm>
-            <a:off x="5248656" y="2423160"/>
+            <a:off x="5368724" y="2423160"/>
             <a:ext cx="109728" cy="109728"/>
           </a:xfrm>
           <a:prstGeom prst="rect">
@@ -3740,7 +3780,7 @@
         </p:nvSpPr>
         <p:spPr>
           <a:xfrm>
-            <a:off x="5202936" y="2304288"/>
+            <a:off x="5323004" y="2304288"/>
             <a:ext cx="201168" cy="320040"/>
           </a:xfrm>
           <a:prstGeom prst="rect">
@@ -3759,7 +3799,10 @@
             <a:r>
               <a:rPr lang="en-US" sz="2000" b="1" dirty="0">
                 <a:solidFill>
-                  <a:srgbClr val="0D7A5F"/>
+                  <a:schemeClr val="accent6">
+                    <a:lumMod val="40000"/>
+                    <a:lumOff val="60000"/>
+                  </a:schemeClr>
                 </a:solidFill>
                 <a:latin typeface="Calibri" pitchFamily="34" charset="0"/>
                 <a:ea typeface="Calibri" pitchFamily="34" charset="-122"/>
@@ -3767,7 +3810,14 @@
               </a:rPr>
               <a:t>›</a:t>
             </a:r>
-            <a:endParaRPr lang="en-US" sz="2000" dirty="0"/>
+            <a:endParaRPr lang="en-US" sz="2000" dirty="0">
+              <a:solidFill>
+                <a:schemeClr val="accent6">
+                  <a:lumMod val="40000"/>
+                  <a:lumOff val="60000"/>
+                </a:schemeClr>
+              </a:solidFill>
+            </a:endParaRPr>
           </a:p>
         </p:txBody>
       </p:sp>
@@ -3779,7 +3829,7 @@
         </p:nvSpPr>
         <p:spPr>
           <a:xfrm>
-            <a:off x="5385816" y="1188720"/>
+            <a:off x="5505884" y="1188720"/>
             <a:ext cx="1554480" cy="2606040"/>
           </a:xfrm>
           <a:prstGeom prst="rect">
@@ -3811,7 +3861,7 @@
         </p:nvSpPr>
         <p:spPr>
           <a:xfrm>
-            <a:off x="5385816" y="1234440"/>
+            <a:off x="5505884" y="1234440"/>
             <a:ext cx="1554480" cy="640080"/>
           </a:xfrm>
           <a:prstGeom prst="rect">
@@ -3828,7 +3878,7 @@
               <a:buNone/>
             </a:pPr>
             <a:r>
-              <a:rPr lang="en-US" sz="2800" b="1" dirty="0">
+              <a:rPr lang="en-US" sz="3600" b="1" dirty="0">
                 <a:solidFill>
                   <a:srgbClr val="FFFFFF"/>
                 </a:solidFill>
@@ -3850,7 +3900,7 @@
         </p:nvSpPr>
         <p:spPr>
           <a:xfrm>
-            <a:off x="5385816" y="1920240"/>
+            <a:off x="5505884" y="1920240"/>
             <a:ext cx="1554480" cy="548640"/>
           </a:xfrm>
           <a:prstGeom prst="rect">
@@ -3867,7 +3917,7 @@
               <a:buNone/>
             </a:pPr>
             <a:r>
-              <a:rPr lang="en-US" sz="1200" b="1" dirty="0">
+              <a:rPr lang="en-US" sz="1600" b="1" dirty="0">
                 <a:solidFill>
                   <a:srgbClr val="FFFFFF"/>
                 </a:solidFill>
@@ -3877,7 +3927,7 @@
               </a:rPr>
               <a:t>Risk Score</a:t>
             </a:r>
-            <a:endParaRPr lang="en-US" sz="1200" dirty="0"/>
+            <a:endParaRPr lang="en-US" sz="1600" dirty="0"/>
           </a:p>
         </p:txBody>
       </p:sp>
@@ -3889,7 +3939,7 @@
         </p:nvSpPr>
         <p:spPr>
           <a:xfrm>
-            <a:off x="5385816" y="2514600"/>
+            <a:off x="5505884" y="2514600"/>
             <a:ext cx="1554480" cy="1143000"/>
           </a:xfrm>
           <a:prstGeom prst="rect">
@@ -3906,7 +3956,7 @@
               <a:buNone/>
             </a:pPr>
             <a:r>
-              <a:rPr lang="en-US" sz="1000" dirty="0">
+              <a:rPr lang="en-US" sz="1100" dirty="0">
                 <a:solidFill>
                   <a:srgbClr val="FFFFFF"/>
                 </a:solidFill>
@@ -3914,9 +3964,20 @@
                 <a:ea typeface="Calibri" pitchFamily="34" charset="-122"/>
                 <a:cs typeface="Calibri" pitchFamily="34" charset="-120"/>
               </a:rPr>
-              <a:t>Instant prediction: Low / Medium / High risk</a:t>
-            </a:r>
-            <a:endParaRPr lang="en-US" sz="1000" dirty="0"/>
+              <a:t>Instant prediction: </a:t>
+            </a:r>
+            <a:r>
+              <a:rPr lang="en-US" sz="1100" dirty="0" smtClean="0">
+                <a:solidFill>
+                  <a:srgbClr val="FFFFFF"/>
+                </a:solidFill>
+                <a:latin typeface="Calibri" pitchFamily="34" charset="0"/>
+                <a:ea typeface="Calibri" pitchFamily="34" charset="-122"/>
+                <a:cs typeface="Calibri" pitchFamily="34" charset="-120"/>
+              </a:rPr>
+              <a:t>Shows risk level</a:t>
+            </a:r>
+            <a:endParaRPr lang="en-US" sz="1100" dirty="0"/>
           </a:p>
         </p:txBody>
       </p:sp>
@@ -3928,7 +3989,7 @@
         </p:nvSpPr>
         <p:spPr>
           <a:xfrm>
-            <a:off x="6967728" y="2423160"/>
+            <a:off x="7087796" y="2423160"/>
             <a:ext cx="109728" cy="109728"/>
           </a:xfrm>
           <a:prstGeom prst="rect">
@@ -3953,7 +4014,7 @@
         </p:nvSpPr>
         <p:spPr>
           <a:xfrm>
-            <a:off x="6922008" y="2304288"/>
+            <a:off x="7042076" y="2304288"/>
             <a:ext cx="201168" cy="320040"/>
           </a:xfrm>
           <a:prstGeom prst="rect">
@@ -3972,7 +4033,10 @@
             <a:r>
               <a:rPr lang="en-US" sz="2000" b="1" dirty="0">
                 <a:solidFill>
-                  <a:srgbClr val="0D7A5F"/>
+                  <a:schemeClr val="accent6">
+                    <a:lumMod val="40000"/>
+                    <a:lumOff val="60000"/>
+                  </a:schemeClr>
                 </a:solidFill>
                 <a:latin typeface="Calibri" pitchFamily="34" charset="0"/>
                 <a:ea typeface="Calibri" pitchFamily="34" charset="-122"/>
@@ -3980,7 +4044,14 @@
               </a:rPr>
               <a:t>›</a:t>
             </a:r>
-            <a:endParaRPr lang="en-US" sz="2000" dirty="0"/>
+            <a:endParaRPr lang="en-US" sz="2000" dirty="0">
+              <a:solidFill>
+                <a:schemeClr val="accent6">
+                  <a:lumMod val="40000"/>
+                  <a:lumOff val="60000"/>
+                </a:schemeClr>
+              </a:solidFill>
+            </a:endParaRPr>
           </a:p>
         </p:txBody>
       </p:sp>
@@ -3992,7 +4063,7 @@
         </p:nvSpPr>
         <p:spPr>
           <a:xfrm>
-            <a:off x="7104888" y="1188720"/>
+            <a:off x="7224956" y="1188720"/>
             <a:ext cx="1554480" cy="2606040"/>
           </a:xfrm>
           <a:prstGeom prst="rect">
@@ -4024,7 +4095,7 @@
         </p:nvSpPr>
         <p:spPr>
           <a:xfrm>
-            <a:off x="7104888" y="1234440"/>
+            <a:off x="7224956" y="1234440"/>
             <a:ext cx="1554480" cy="640080"/>
           </a:xfrm>
           <a:prstGeom prst="rect">
@@ -4041,7 +4112,7 @@
               <a:buNone/>
             </a:pPr>
             <a:r>
-              <a:rPr lang="en-US" sz="2800" b="1" dirty="0">
+              <a:rPr lang="en-US" sz="3600" b="1" dirty="0">
                 <a:solidFill>
                   <a:srgbClr val="FFFFFF"/>
                 </a:solidFill>
@@ -4051,7 +4122,7 @@
               </a:rPr>
               <a:t>05</a:t>
             </a:r>
-            <a:endParaRPr lang="en-US" sz="2800" dirty="0"/>
+            <a:endParaRPr lang="en-US" sz="3600" dirty="0"/>
           </a:p>
         </p:txBody>
       </p:sp>
@@ -4063,7 +4134,7 @@
         </p:nvSpPr>
         <p:spPr>
           <a:xfrm>
-            <a:off x="7104888" y="1920240"/>
+            <a:off x="7224956" y="1920240"/>
             <a:ext cx="1554480" cy="548640"/>
           </a:xfrm>
           <a:prstGeom prst="rect">
@@ -4080,7 +4151,7 @@
               <a:buNone/>
             </a:pPr>
             <a:r>
-              <a:rPr lang="en-US" sz="1200" b="1" dirty="0">
+              <a:rPr lang="en-US" sz="1600" b="1" dirty="0">
                 <a:solidFill>
                   <a:srgbClr val="FFFFFF"/>
                 </a:solidFill>
@@ -4102,7 +4173,7 @@
         </p:nvSpPr>
         <p:spPr>
           <a:xfrm>
-            <a:off x="7104888" y="2514600"/>
+            <a:off x="7224956" y="2514600"/>
             <a:ext cx="1554480" cy="1143000"/>
           </a:xfrm>
           <a:prstGeom prst="rect">
@@ -4119,7 +4190,7 @@
               <a:buNone/>
             </a:pPr>
             <a:r>
-              <a:rPr lang="en-US" sz="1000" dirty="0">
+              <a:rPr lang="en-US" sz="1100" dirty="0">
                 <a:solidFill>
                   <a:srgbClr val="FFFFFF"/>
                 </a:solidFill>
@@ -4129,7 +4200,7 @@
               </a:rPr>
               <a:t>High-risk users see nearest hospitals on a map</a:t>
             </a:r>
-            <a:endParaRPr lang="en-US" sz="1000" dirty="0"/>
+            <a:endParaRPr lang="en-US" sz="1100" dirty="0"/>
           </a:p>
         </p:txBody>
       </p:sp>
@@ -4215,7 +4286,7 @@
               <a:buNone/>
             </a:pPr>
             <a:r>
-              <a:rPr lang="en-US" sz="1350" i="1" dirty="0">
+              <a:rPr lang="en-US" sz="1400" i="1" dirty="0">
                 <a:solidFill>
                   <a:srgbClr val="6EE7B7"/>
                 </a:solidFill>
@@ -4225,7 +4296,7 @@
               </a:rPr>
               <a:t>This bridges the gap between symptom awareness and actual treatment — in under 60 seconds.</a:t>
             </a:r>
-            <a:endParaRPr lang="en-US" sz="1350" dirty="0"/>
+            <a:endParaRPr lang="en-US" sz="1400" dirty="0"/>
           </a:p>
         </p:txBody>
       </p:sp>
@@ -4234,13 +4305,13 @@
   <p:clrMapOvr>
     <a:masterClrMapping/>
   </p:clrMapOvr>
-  <mc:AlternateContent xmlns:mc="http://schemas.openxmlformats.org/markup-compatibility/2006">
-    <mc:Choice xmlns:p14="http://schemas.microsoft.com/office/powerpoint/2010/main" Requires="p14">
+  <mc:AlternateContent xmlns:mc="http://schemas.openxmlformats.org/markup-compatibility/2006" xmlns:p14="http://schemas.microsoft.com/office/powerpoint/2010/main">
+    <mc:Choice Requires="p14">
       <p:transition spd="med" p14:dur="700">
         <p:fade/>
       </p:transition>
     </mc:Choice>
-    <mc:Fallback>
+    <mc:Fallback xmlns="">
       <p:transition spd="med">
         <p:fade/>
       </p:transition>
@@ -4335,7 +4406,7 @@
               <a:buNone/>
             </a:pPr>
             <a:r>
-              <a:rPr lang="en-US" sz="1200" b="1" kern="0" spc="400" dirty="0">
+              <a:rPr lang="en-US" sz="1400" b="1" kern="0" spc="400" dirty="0">
                 <a:solidFill>
                   <a:srgbClr val="10B981"/>
                 </a:solidFill>
@@ -4345,7 +4416,7 @@
               </a:rPr>
               <a:t>LIVE DEMO</a:t>
             </a:r>
-            <a:endParaRPr lang="en-US" sz="1200" dirty="0"/>
+            <a:endParaRPr lang="en-US" sz="1400" dirty="0"/>
           </a:p>
         </p:txBody>
       </p:sp>
@@ -4374,7 +4445,7 @@
               <a:buNone/>
             </a:pPr>
             <a:r>
-              <a:rPr lang="en-US" sz="4000" b="1" dirty="0">
+              <a:rPr lang="en-US" sz="4400" b="1" dirty="0">
                 <a:solidFill>
                   <a:srgbClr val="FFFFFF"/>
                 </a:solidFill>
@@ -4384,7 +4455,7 @@
               </a:rPr>
               <a:t>See MalariaDx in Action</a:t>
             </a:r>
-            <a:endParaRPr lang="en-US" sz="4000" dirty="0"/>
+            <a:endParaRPr lang="en-US" sz="4400" dirty="0"/>
           </a:p>
         </p:txBody>
       </p:sp>
@@ -4494,7 +4565,7 @@
               <a:buNone/>
             </a:pPr>
             <a:r>
-              <a:rPr lang="en-US" sz="1200" b="1" dirty="0">
+              <a:rPr lang="en-US" sz="1600" b="1" dirty="0">
                 <a:solidFill>
                   <a:srgbClr val="FFFFFF"/>
                 </a:solidFill>
@@ -4504,7 +4575,7 @@
               </a:rPr>
               <a:t>01 — Symptom Input</a:t>
             </a:r>
-            <a:endParaRPr lang="en-US" sz="1200" dirty="0"/>
+            <a:endParaRPr lang="en-US" sz="1600" dirty="0"/>
           </a:p>
         </p:txBody>
       </p:sp>
@@ -4533,7 +4604,7 @@
               <a:buNone/>
             </a:pPr>
             <a:r>
-              <a:rPr lang="en-US" sz="1100" dirty="0">
+              <a:rPr lang="en-US" sz="1400" dirty="0">
                 <a:solidFill>
                   <a:srgbClr val="6EE7B7"/>
                 </a:solidFill>
@@ -4543,7 +4614,7 @@
               </a:rPr>
               <a:t>User enters fever, chills, vomiting, age and demographic info through a clean, intuitive form.</a:t>
             </a:r>
-            <a:endParaRPr lang="en-US" sz="1100" dirty="0"/>
+            <a:endParaRPr lang="en-US" sz="1400" dirty="0"/>
           </a:p>
         </p:txBody>
       </p:sp>
@@ -4653,7 +4724,7 @@
               <a:buNone/>
             </a:pPr>
             <a:r>
-              <a:rPr lang="en-US" sz="1200" b="1" dirty="0">
+              <a:rPr lang="en-US" sz="1600" b="1" dirty="0">
                 <a:solidFill>
                   <a:srgbClr val="FFFFFF"/>
                 </a:solidFill>
@@ -4663,7 +4734,7 @@
               </a:rPr>
               <a:t>02 — Risk Prediction</a:t>
             </a:r>
-            <a:endParaRPr lang="en-US" sz="1200" dirty="0"/>
+            <a:endParaRPr lang="en-US" sz="1600" dirty="0"/>
           </a:p>
         </p:txBody>
       </p:sp>
@@ -4692,7 +4763,7 @@
               <a:buNone/>
             </a:pPr>
             <a:r>
-              <a:rPr lang="en-US" sz="1100" dirty="0">
+              <a:rPr lang="en-US" sz="1400" dirty="0">
                 <a:solidFill>
                   <a:srgbClr val="6EE7B7"/>
                 </a:solidFill>
@@ -4700,9 +4771,31 @@
                 <a:ea typeface="Calibri" pitchFamily="34" charset="-122"/>
                 <a:cs typeface="Calibri" pitchFamily="34" charset="-120"/>
               </a:rPr>
-              <a:t>One click. The AI model returns Low / Medium / High malaria risk with confidence score.</a:t>
-            </a:r>
-            <a:endParaRPr lang="en-US" sz="1100" dirty="0"/>
+              <a:t>One click. The AI model returns </a:t>
+            </a:r>
+            <a:r>
+              <a:rPr lang="en-US" sz="1400" dirty="0" smtClean="0">
+                <a:solidFill>
+                  <a:srgbClr val="6EE7B7"/>
+                </a:solidFill>
+                <a:latin typeface="Calibri" pitchFamily="34" charset="0"/>
+                <a:ea typeface="Calibri" pitchFamily="34" charset="-122"/>
+                <a:cs typeface="Calibri" pitchFamily="34" charset="-120"/>
+              </a:rPr>
+              <a:t> </a:t>
+            </a:r>
+            <a:r>
+              <a:rPr lang="en-US" sz="1400" dirty="0">
+                <a:solidFill>
+                  <a:srgbClr val="6EE7B7"/>
+                </a:solidFill>
+                <a:latin typeface="Calibri" pitchFamily="34" charset="0"/>
+                <a:ea typeface="Calibri" pitchFamily="34" charset="-122"/>
+                <a:cs typeface="Calibri" pitchFamily="34" charset="-120"/>
+              </a:rPr>
+              <a:t>malaria risk with confidence score.</a:t>
+            </a:r>
+            <a:endParaRPr lang="en-US" sz="1400" dirty="0"/>
           </a:p>
         </p:txBody>
       </p:sp>
@@ -4812,7 +4905,7 @@
               <a:buNone/>
             </a:pPr>
             <a:r>
-              <a:rPr lang="en-US" sz="1200" b="1" dirty="0">
+              <a:rPr lang="en-US" sz="1600" b="1" dirty="0">
                 <a:solidFill>
                   <a:srgbClr val="FFFFFF"/>
                 </a:solidFill>
@@ -4822,7 +4915,7 @@
               </a:rPr>
               <a:t>03 — Hospital Finder</a:t>
             </a:r>
-            <a:endParaRPr lang="en-US" sz="1200" dirty="0"/>
+            <a:endParaRPr lang="en-US" sz="1600" dirty="0"/>
           </a:p>
         </p:txBody>
       </p:sp>
@@ -4851,7 +4944,7 @@
               <a:buNone/>
             </a:pPr>
             <a:r>
-              <a:rPr lang="en-US" sz="1100" dirty="0">
+              <a:rPr lang="en-US" sz="1400" dirty="0">
                 <a:solidFill>
                   <a:srgbClr val="6EE7B7"/>
                 </a:solidFill>
@@ -4861,7 +4954,7 @@
               </a:rPr>
               <a:t>High-risk patients instantly see a map of nearby treatment centers with directions.</a:t>
             </a:r>
-            <a:endParaRPr lang="en-US" sz="1100" dirty="0"/>
+            <a:endParaRPr lang="en-US" sz="1400" dirty="0"/>
           </a:p>
         </p:txBody>
       </p:sp>
@@ -4898,7 +4991,18 @@
                 <a:ea typeface="Calibri" pitchFamily="34" charset="-122"/>
                 <a:cs typeface="Calibri" pitchFamily="34" charset="-120"/>
               </a:rPr>
-              <a:t>🔗  malaria-dx.streamlit.app</a:t>
+              <a:t>🔗  </a:t>
+            </a:r>
+            <a:r>
+              <a:rPr lang="en-US" sz="1600" b="1" dirty="0">
+                <a:solidFill>
+                  <a:srgbClr val="10B981"/>
+                </a:solidFill>
+                <a:latin typeface="Calibri" pitchFamily="34" charset="0"/>
+                <a:ea typeface="Calibri" pitchFamily="34" charset="-122"/>
+                <a:cs typeface="Calibri" pitchFamily="34" charset="-120"/>
+              </a:rPr>
+              <a:t>malaria-dx.streamlit.app</a:t>
             </a:r>
             <a:endParaRPr lang="en-US" sz="1200" dirty="0"/>
           </a:p>
@@ -4909,13 +5013,13 @@
   <p:clrMapOvr>
     <a:masterClrMapping/>
   </p:clrMapOvr>
-  <mc:AlternateContent xmlns:mc="http://schemas.openxmlformats.org/markup-compatibility/2006">
-    <mc:Choice xmlns:p14="http://schemas.microsoft.com/office/powerpoint/2010/main" Requires="p14">
+  <mc:AlternateContent xmlns:mc="http://schemas.openxmlformats.org/markup-compatibility/2006" xmlns:p14="http://schemas.microsoft.com/office/powerpoint/2010/main">
+    <mc:Choice Requires="p14">
       <p:transition spd="med" p14:dur="700">
         <p:fade/>
       </p:transition>
     </mc:Choice>
-    <mc:Fallback>
+    <mc:Fallback xmlns="">
       <p:transition spd="med">
         <p:fade/>
       </p:transition>
@@ -5006,7 +5110,7 @@
               <a:buNone/>
             </a:pPr>
             <a:r>
-              <a:rPr lang="en-US" sz="2800" b="1" dirty="0">
+              <a:rPr lang="en-US" sz="3600" b="1" dirty="0">
                 <a:solidFill>
                   <a:srgbClr val="FFFFFF"/>
                 </a:solidFill>
@@ -5016,7 +5120,7 @@
               </a:rPr>
               <a:t>AI &amp; DATA</a:t>
             </a:r>
-            <a:endParaRPr lang="en-US" sz="2800" dirty="0"/>
+            <a:endParaRPr lang="en-US" sz="3600" dirty="0"/>
           </a:p>
         </p:txBody>
       </p:sp>
@@ -5126,7 +5230,7 @@
               <a:buNone/>
             </a:pPr>
             <a:r>
-              <a:rPr lang="en-US" sz="1200" b="1" dirty="0">
+              <a:rPr lang="en-US" b="1" dirty="0">
                 <a:solidFill>
                   <a:srgbClr val="0A3D2E"/>
                 </a:solidFill>
@@ -5136,7 +5240,7 @@
               </a:rPr>
               <a:t>Dataset</a:t>
             </a:r>
-            <a:endParaRPr lang="en-US" sz="1200" dirty="0"/>
+            <a:endParaRPr lang="en-US" dirty="0"/>
           </a:p>
         </p:txBody>
       </p:sp>
@@ -5148,8 +5252,8 @@
         </p:nvSpPr>
         <p:spPr>
           <a:xfrm>
-            <a:off x="548640" y="1572768"/>
-            <a:ext cx="4663440" cy="502920"/>
+            <a:off x="457200" y="1572768"/>
+            <a:ext cx="4754880" cy="502920"/>
           </a:xfrm>
           <a:prstGeom prst="rect">
             <a:avLst/>
@@ -5165,7 +5269,7 @@
               <a:buNone/>
             </a:pPr>
             <a:r>
-              <a:rPr lang="en-US" sz="1100" dirty="0">
+              <a:rPr lang="en-US" sz="1400" dirty="0">
                 <a:solidFill>
                   <a:srgbClr val="64748B"/>
                 </a:solidFill>
@@ -5173,9 +5277,9 @@
                 <a:ea typeface="Calibri" pitchFamily="34" charset="-122"/>
                 <a:cs typeface="Calibri" pitchFamily="34" charset="-120"/>
               </a:rPr>
-              <a:t>Clinical symptom &amp; demographic data with class imbalance handling (SMOTE)</a:t>
-            </a:r>
-            <a:endParaRPr lang="en-US" sz="1100" dirty="0"/>
+              <a:t>Clinical symptom &amp; demographic data </a:t>
+            </a:r>
+            <a:endParaRPr lang="en-US" sz="1400" dirty="0"/>
           </a:p>
         </p:txBody>
       </p:sp>
@@ -5261,7 +5365,7 @@
               <a:buNone/>
             </a:pPr>
             <a:r>
-              <a:rPr lang="en-US" sz="1200" b="1" dirty="0">
+              <a:rPr lang="en-US" b="1" dirty="0">
                 <a:solidFill>
                   <a:srgbClr val="0A3D2E"/>
                 </a:solidFill>
@@ -5271,7 +5375,7 @@
               </a:rPr>
               <a:t>Models Evaluated</a:t>
             </a:r>
-            <a:endParaRPr lang="en-US" sz="1200" dirty="0"/>
+            <a:endParaRPr lang="en-US" dirty="0"/>
           </a:p>
         </p:txBody>
       </p:sp>
@@ -5300,7 +5404,7 @@
               <a:buNone/>
             </a:pPr>
             <a:r>
-              <a:rPr lang="en-US" sz="1100" dirty="0">
+              <a:rPr lang="en-US" sz="1600" dirty="0">
                 <a:solidFill>
                   <a:srgbClr val="64748B"/>
                 </a:solidFill>
@@ -5310,7 +5414,7 @@
               </a:rPr>
               <a:t>Random Forest Classifier, XGBoost Classifier</a:t>
             </a:r>
-            <a:endParaRPr lang="en-US" sz="1100" dirty="0"/>
+            <a:endParaRPr lang="en-US" sz="1600" dirty="0"/>
           </a:p>
         </p:txBody>
       </p:sp>
@@ -5396,17 +5500,16 @@
               <a:buNone/>
             </a:pPr>
             <a:r>
-              <a:rPr lang="en-US" sz="1200" b="1" dirty="0">
+              <a:rPr lang="en-US" b="1" dirty="0" smtClean="0">
                 <a:solidFill>
                   <a:srgbClr val="0A3D2E"/>
                 </a:solidFill>
                 <a:latin typeface="Calibri" pitchFamily="34" charset="0"/>
-                <a:ea typeface="Calibri" pitchFamily="34" charset="-122"/>
-                <a:cs typeface="Calibri" pitchFamily="34" charset="-120"/>
-              </a:rPr>
-              <a:t>Optimization</a:t>
-            </a:r>
-            <a:endParaRPr lang="en-US" sz="1200" dirty="0"/>
+                <a:cs typeface="Calibri" pitchFamily="34" charset="-120"/>
+              </a:rPr>
+              <a:t>Cross - Validation</a:t>
+            </a:r>
+            <a:endParaRPr lang="en-US" dirty="0"/>
           </a:p>
         </p:txBody>
       </p:sp>
@@ -5435,17 +5538,16 @@
               <a:buNone/>
             </a:pPr>
             <a:r>
-              <a:rPr lang="en-US" sz="1100" dirty="0">
+              <a:rPr lang="en-US" sz="1200" dirty="0" smtClean="0">
                 <a:solidFill>
                   <a:srgbClr val="64748B"/>
                 </a:solidFill>
                 <a:latin typeface="Calibri" pitchFamily="34" charset="0"/>
-                <a:ea typeface="Calibri" pitchFamily="34" charset="-122"/>
-                <a:cs typeface="Calibri" pitchFamily="34" charset="-120"/>
-              </a:rPr>
-              <a:t>GridSearchCV / RandomizedSearchCV with F2 scoring &amp; threshold sweeping</a:t>
-            </a:r>
-            <a:endParaRPr lang="en-US" sz="1100" dirty="0"/>
+                <a:cs typeface="Calibri" pitchFamily="34" charset="-120"/>
+              </a:rPr>
+              <a:t>Cross validated models in Pipelines to avoid data leakage</a:t>
+            </a:r>
+            <a:endParaRPr lang="en-US" sz="1200" dirty="0"/>
           </a:p>
         </p:txBody>
       </p:sp>
@@ -5726,7 +5828,7 @@
               <a:buNone/>
             </a:pPr>
             <a:r>
-              <a:rPr lang="en-US" sz="3800" b="1" dirty="0">
+              <a:rPr lang="en-US" sz="3800" b="1" smtClean="0">
                 <a:solidFill>
                   <a:srgbClr val="FFFFFF"/>
                 </a:solidFill>
@@ -5829,7 +5931,7 @@
               <a:buNone/>
             </a:pPr>
             <a:r>
-              <a:rPr lang="en-US" sz="1150" i="1" dirty="0">
+              <a:rPr lang="en-US" sz="1200" i="1" dirty="0">
                 <a:solidFill>
                   <a:srgbClr val="6EE7B7"/>
                 </a:solidFill>
@@ -5839,7 +5941,7 @@
               </a:rPr>
               <a:t>Optimized for high recall — minimizing missed malaria cases is the top priority.</a:t>
             </a:r>
-            <a:endParaRPr lang="en-US" sz="1150" dirty="0"/>
+            <a:endParaRPr lang="en-US" sz="1200" dirty="0"/>
           </a:p>
         </p:txBody>
       </p:sp>
@@ -5848,13 +5950,13 @@
   <p:clrMapOvr>
     <a:masterClrMapping/>
   </p:clrMapOvr>
-  <mc:AlternateContent xmlns:mc="http://schemas.openxmlformats.org/markup-compatibility/2006">
-    <mc:Choice xmlns:p14="http://schemas.microsoft.com/office/powerpoint/2010/main" Requires="p14">
+  <mc:AlternateContent xmlns:mc="http://schemas.openxmlformats.org/markup-compatibility/2006" xmlns:p14="http://schemas.microsoft.com/office/powerpoint/2010/main">
+    <mc:Choice Requires="p14">
       <p:transition spd="med" p14:dur="700">
         <p:fade/>
       </p:transition>
     </mc:Choice>
-    <mc:Fallback>
+    <mc:Fallback xmlns="">
       <p:transition spd="med">
         <p:fade/>
       </p:transition>
@@ -6901,13 +7003,13 @@
   <p:clrMapOvr>
     <a:masterClrMapping/>
   </p:clrMapOvr>
-  <mc:AlternateContent xmlns:mc="http://schemas.openxmlformats.org/markup-compatibility/2006">
-    <mc:Choice xmlns:p14="http://schemas.microsoft.com/office/powerpoint/2010/main" Requires="p14">
+  <mc:AlternateContent xmlns:mc="http://schemas.openxmlformats.org/markup-compatibility/2006" xmlns:p14="http://schemas.microsoft.com/office/powerpoint/2010/main">
+    <mc:Choice Requires="p14">
       <p:transition spd="med" p14:dur="700">
         <p:fade/>
       </p:transition>
     </mc:Choice>
-    <mc:Fallback>
+    <mc:Fallback xmlns="">
       <p:transition spd="med">
         <p:fade/>
       </p:transition>

--- a/reports and documentations/MalariaDx_Pitch.pptx
+++ b/reports and documentations/MalariaDx_Pitch.pptx
@@ -6109,7 +6109,7 @@
                 <a:ea typeface="Calibri" pitchFamily="34" charset="-122"/>
                 <a:cs typeface="Calibri" pitchFamily="34" charset="-120"/>
               </a:rPr>
-              <a:t>Nigeria</a:t>
+              <a:t>Africa</a:t>
             </a:r>
             <a:endParaRPr lang="en-US" sz="3800" dirty="0"/>
           </a:p>
